--- a/Lessons/Lesson A3-10 - ACID & Distributed Databases [HL ONLY].pptx
+++ b/Lessons/Lesson A3-10 - ACID & Distributed Databases [HL ONLY].pptx
@@ -141,7 +141,7 @@
 <file path=ppt/revisionInfo.xml><?xml version="1.0" encoding="utf-8"?>
 <p1510:revInfo xmlns:a="http://schemas.openxmlformats.org/drawingml/2006/main" xmlns:r="http://schemas.openxmlformats.org/officeDocument/2006/relationships" xmlns:p1510="http://schemas.microsoft.com/office/powerpoint/2015/10/main">
   <p1510:revLst>
-    <p1510:client id="{9F5EFF97-A4D1-4A04-A3EC-4E121B0925F1}" v="63" dt="2026-01-28T18:54:13.454"/>
+    <p1510:client id="{9F5EFF97-A4D1-4A04-A3EC-4E121B0925F1}" v="64" dt="2026-01-30T16:28:16.640"/>
   </p1510:revLst>
 </p1510:revInfo>
 </file>
@@ -151,16 +151,24 @@
   <pc:docChgLst>
     <pc:chgData name="Michael Hill" userId="41dba03d-e58d-4389-9894-554c10310ba4" providerId="ADAL" clId="{EF23FE1D-A042-481E-AFD7-2A9FB0847F54}"/>
     <pc:docChg chg="undo custSel addSld delSld modSld sldOrd">
-      <pc:chgData name="Michael Hill" userId="41dba03d-e58d-4389-9894-554c10310ba4" providerId="ADAL" clId="{EF23FE1D-A042-481E-AFD7-2A9FB0847F54}" dt="2026-01-28T19:05:13.386" v="8292" actId="20577"/>
+      <pc:chgData name="Michael Hill" userId="41dba03d-e58d-4389-9894-554c10310ba4" providerId="ADAL" clId="{EF23FE1D-A042-481E-AFD7-2A9FB0847F54}" dt="2026-01-30T21:46:22.947" v="8420" actId="20577"/>
       <pc:docMkLst>
         <pc:docMk/>
       </pc:docMkLst>
-      <pc:sldChg chg="modSp mod">
-        <pc:chgData name="Michael Hill" userId="41dba03d-e58d-4389-9894-554c10310ba4" providerId="ADAL" clId="{EF23FE1D-A042-481E-AFD7-2A9FB0847F54}" dt="2026-01-28T18:02:11.615" v="42" actId="14100"/>
+      <pc:sldChg chg="addSp modSp mod">
+        <pc:chgData name="Michael Hill" userId="41dba03d-e58d-4389-9894-554c10310ba4" providerId="ADAL" clId="{EF23FE1D-A042-481E-AFD7-2A9FB0847F54}" dt="2026-01-30T16:28:16.640" v="8305"/>
         <pc:sldMkLst>
           <pc:docMk/>
           <pc:sldMk cId="1878848435" sldId="256"/>
         </pc:sldMkLst>
+        <pc:spChg chg="add mod">
+          <ac:chgData name="Michael Hill" userId="41dba03d-e58d-4389-9894-554c10310ba4" providerId="ADAL" clId="{EF23FE1D-A042-481E-AFD7-2A9FB0847F54}" dt="2026-01-30T16:28:16.640" v="8305"/>
+          <ac:spMkLst>
+            <pc:docMk/>
+            <pc:sldMk cId="1878848435" sldId="256"/>
+            <ac:spMk id="2" creationId="{5503F38F-8A7D-72A2-D3EF-F2D4051604CF}"/>
+          </ac:spMkLst>
+        </pc:spChg>
         <pc:spChg chg="mod">
           <ac:chgData name="Michael Hill" userId="41dba03d-e58d-4389-9894-554c10310ba4" providerId="ADAL" clId="{EF23FE1D-A042-481E-AFD7-2A9FB0847F54}" dt="2026-01-28T18:02:11.615" v="42" actId="14100"/>
           <ac:spMkLst>
@@ -222,12 +230,19 @@
             <ac:spMk id="2" creationId="{59F9F4D8-2132-AD15-CEDB-AFE660429BD8}"/>
           </ac:spMkLst>
         </pc:spChg>
-        <pc:spChg chg="del">
-          <ac:chgData name="Michael Hill" userId="41dba03d-e58d-4389-9894-554c10310ba4" providerId="ADAL" clId="{EF23FE1D-A042-481E-AFD7-2A9FB0847F54}" dt="2026-01-28T18:08:41.877" v="757" actId="478"/>
+      </pc:sldChg>
+      <pc:sldChg chg="modSp mod">
+        <pc:chgData name="Michael Hill" userId="41dba03d-e58d-4389-9894-554c10310ba4" providerId="ADAL" clId="{EF23FE1D-A042-481E-AFD7-2A9FB0847F54}" dt="2026-01-30T21:46:22.947" v="8420" actId="20577"/>
+        <pc:sldMkLst>
+          <pc:docMk/>
+          <pc:sldMk cId="782115972" sldId="454"/>
+        </pc:sldMkLst>
+        <pc:spChg chg="mod">
+          <ac:chgData name="Michael Hill" userId="41dba03d-e58d-4389-9894-554c10310ba4" providerId="ADAL" clId="{EF23FE1D-A042-481E-AFD7-2A9FB0847F54}" dt="2026-01-30T21:46:22.947" v="8420" actId="20577"/>
           <ac:spMkLst>
             <pc:docMk/>
-            <pc:sldMk cId="4217859482" sldId="427"/>
-            <ac:spMk id="8" creationId="{D12E8945-8B7A-5FF6-41CB-3A36AA2FF6DA}"/>
+            <pc:sldMk cId="782115972" sldId="454"/>
+            <ac:spMk id="8" creationId="{F65BA143-CA8C-162E-8EE1-5979D9C12717}"/>
           </ac:spMkLst>
         </pc:spChg>
       </pc:sldChg>
@@ -253,14 +268,6 @@
             <ac:spMk id="8" creationId="{82EF2758-F3AE-312F-416D-08E61458A56C}"/>
           </ac:spMkLst>
         </pc:spChg>
-        <pc:picChg chg="del">
-          <ac:chgData name="Michael Hill" userId="41dba03d-e58d-4389-9894-554c10310ba4" providerId="ADAL" clId="{EF23FE1D-A042-481E-AFD7-2A9FB0847F54}" dt="2026-01-28T18:10:14.338" v="902" actId="478"/>
-          <ac:picMkLst>
-            <pc:docMk/>
-            <pc:sldMk cId="1393903321" sldId="473"/>
-            <ac:picMk id="13" creationId="{C98EBEC7-F437-19B5-AC38-D600218E569E}"/>
-          </ac:picMkLst>
-        </pc:picChg>
       </pc:sldChg>
       <pc:sldChg chg="addSp delSp modSp mod">
         <pc:chgData name="Michael Hill" userId="41dba03d-e58d-4389-9894-554c10310ba4" providerId="ADAL" clId="{EF23FE1D-A042-481E-AFD7-2A9FB0847F54}" dt="2026-01-28T18:16:31.763" v="1842" actId="1076"/>
@@ -268,22 +275,6 @@
           <pc:docMk/>
           <pc:sldMk cId="2576407648" sldId="474"/>
         </pc:sldMkLst>
-        <pc:spChg chg="add del mod">
-          <ac:chgData name="Michael Hill" userId="41dba03d-e58d-4389-9894-554c10310ba4" providerId="ADAL" clId="{EF23FE1D-A042-481E-AFD7-2A9FB0847F54}" dt="2026-01-28T18:14:33.203" v="1625" actId="478"/>
-          <ac:spMkLst>
-            <pc:docMk/>
-            <pc:sldMk cId="2576407648" sldId="474"/>
-            <ac:spMk id="2" creationId="{5EDCBCA9-457C-40A3-F01A-989DEC91128B}"/>
-          </ac:spMkLst>
-        </pc:spChg>
-        <pc:spChg chg="add">
-          <ac:chgData name="Michael Hill" userId="41dba03d-e58d-4389-9894-554c10310ba4" providerId="ADAL" clId="{EF23FE1D-A042-481E-AFD7-2A9FB0847F54}" dt="2026-01-28T18:14:40.501" v="1626"/>
-          <ac:spMkLst>
-            <pc:docMk/>
-            <pc:sldMk cId="2576407648" sldId="474"/>
-            <ac:spMk id="3" creationId="{AAE437B6-CA34-B32F-7B72-AA9D1DD17A1F}"/>
-          </ac:spMkLst>
-        </pc:spChg>
         <pc:spChg chg="mod">
           <ac:chgData name="Michael Hill" userId="41dba03d-e58d-4389-9894-554c10310ba4" providerId="ADAL" clId="{EF23FE1D-A042-481E-AFD7-2A9FB0847F54}" dt="2026-01-28T18:11:06.518" v="998" actId="1076"/>
           <ac:spMkLst>
@@ -306,22 +297,6 @@
             <pc:docMk/>
             <pc:sldMk cId="2576407648" sldId="474"/>
             <ac:picMk id="10" creationId="{76652068-EAB7-B114-52A9-CCE1C76521A7}"/>
-          </ac:picMkLst>
-        </pc:picChg>
-        <pc:picChg chg="add del mod">
-          <ac:chgData name="Michael Hill" userId="41dba03d-e58d-4389-9894-554c10310ba4" providerId="ADAL" clId="{EF23FE1D-A042-481E-AFD7-2A9FB0847F54}" dt="2026-01-28T18:14:23.496" v="1621" actId="478"/>
-          <ac:picMkLst>
-            <pc:docMk/>
-            <pc:sldMk cId="2576407648" sldId="474"/>
-            <ac:picMk id="1026" creationId="{C00F449B-A0F0-3BCC-696C-AFCDAB3FC2F4}"/>
-          </ac:picMkLst>
-        </pc:picChg>
-        <pc:picChg chg="del">
-          <ac:chgData name="Michael Hill" userId="41dba03d-e58d-4389-9894-554c10310ba4" providerId="ADAL" clId="{EF23FE1D-A042-481E-AFD7-2A9FB0847F54}" dt="2026-01-28T18:11:07.416" v="999" actId="478"/>
-          <ac:picMkLst>
-            <pc:docMk/>
-            <pc:sldMk cId="2576407648" sldId="474"/>
-            <ac:picMk id="1030" creationId="{FD0C1B88-1CC4-66C9-8B3F-900D9AFEDA2C}"/>
           </ac:picMkLst>
         </pc:picChg>
       </pc:sldChg>
@@ -348,169 +323,12 @@
           </ac:spMkLst>
         </pc:spChg>
       </pc:sldChg>
-      <pc:sldChg chg="del">
-        <pc:chgData name="Michael Hill" userId="41dba03d-e58d-4389-9894-554c10310ba4" providerId="ADAL" clId="{EF23FE1D-A042-481E-AFD7-2A9FB0847F54}" dt="2026-01-28T18:31:38.454" v="4346" actId="47"/>
-        <pc:sldMkLst>
-          <pc:docMk/>
-          <pc:sldMk cId="3266859534" sldId="492"/>
-        </pc:sldMkLst>
-      </pc:sldChg>
-      <pc:sldChg chg="del">
-        <pc:chgData name="Michael Hill" userId="41dba03d-e58d-4389-9894-554c10310ba4" providerId="ADAL" clId="{EF23FE1D-A042-481E-AFD7-2A9FB0847F54}" dt="2026-01-28T18:31:38.454" v="4346" actId="47"/>
-        <pc:sldMkLst>
-          <pc:docMk/>
-          <pc:sldMk cId="2423538804" sldId="493"/>
-        </pc:sldMkLst>
-      </pc:sldChg>
-      <pc:sldChg chg="del">
-        <pc:chgData name="Michael Hill" userId="41dba03d-e58d-4389-9894-554c10310ba4" providerId="ADAL" clId="{EF23FE1D-A042-481E-AFD7-2A9FB0847F54}" dt="2026-01-28T18:31:38.454" v="4346" actId="47"/>
-        <pc:sldMkLst>
-          <pc:docMk/>
-          <pc:sldMk cId="1307410049" sldId="494"/>
-        </pc:sldMkLst>
-      </pc:sldChg>
-      <pc:sldChg chg="del">
-        <pc:chgData name="Michael Hill" userId="41dba03d-e58d-4389-9894-554c10310ba4" providerId="ADAL" clId="{EF23FE1D-A042-481E-AFD7-2A9FB0847F54}" dt="2026-01-28T18:31:38.454" v="4346" actId="47"/>
-        <pc:sldMkLst>
-          <pc:docMk/>
-          <pc:sldMk cId="3631406678" sldId="495"/>
-        </pc:sldMkLst>
-      </pc:sldChg>
-      <pc:sldChg chg="del">
-        <pc:chgData name="Michael Hill" userId="41dba03d-e58d-4389-9894-554c10310ba4" providerId="ADAL" clId="{EF23FE1D-A042-481E-AFD7-2A9FB0847F54}" dt="2026-01-28T18:31:38.454" v="4346" actId="47"/>
-        <pc:sldMkLst>
-          <pc:docMk/>
-          <pc:sldMk cId="4037451407" sldId="496"/>
-        </pc:sldMkLst>
-      </pc:sldChg>
-      <pc:sldChg chg="del">
-        <pc:chgData name="Michael Hill" userId="41dba03d-e58d-4389-9894-554c10310ba4" providerId="ADAL" clId="{EF23FE1D-A042-481E-AFD7-2A9FB0847F54}" dt="2026-01-28T18:31:38.454" v="4346" actId="47"/>
-        <pc:sldMkLst>
-          <pc:docMk/>
-          <pc:sldMk cId="1627190219" sldId="497"/>
-        </pc:sldMkLst>
-      </pc:sldChg>
-      <pc:sldChg chg="del">
-        <pc:chgData name="Michael Hill" userId="41dba03d-e58d-4389-9894-554c10310ba4" providerId="ADAL" clId="{EF23FE1D-A042-481E-AFD7-2A9FB0847F54}" dt="2026-01-28T18:31:38.454" v="4346" actId="47"/>
-        <pc:sldMkLst>
-          <pc:docMk/>
-          <pc:sldMk cId="2044529409" sldId="498"/>
-        </pc:sldMkLst>
-      </pc:sldChg>
-      <pc:sldChg chg="del">
-        <pc:chgData name="Michael Hill" userId="41dba03d-e58d-4389-9894-554c10310ba4" providerId="ADAL" clId="{EF23FE1D-A042-481E-AFD7-2A9FB0847F54}" dt="2026-01-28T18:31:38.454" v="4346" actId="47"/>
-        <pc:sldMkLst>
-          <pc:docMk/>
-          <pc:sldMk cId="275706551" sldId="499"/>
-        </pc:sldMkLst>
-      </pc:sldChg>
-      <pc:sldChg chg="del">
-        <pc:chgData name="Michael Hill" userId="41dba03d-e58d-4389-9894-554c10310ba4" providerId="ADAL" clId="{EF23FE1D-A042-481E-AFD7-2A9FB0847F54}" dt="2026-01-28T18:31:38.454" v="4346" actId="47"/>
-        <pc:sldMkLst>
-          <pc:docMk/>
-          <pc:sldMk cId="1124391626" sldId="500"/>
-        </pc:sldMkLst>
-      </pc:sldChg>
-      <pc:sldChg chg="del">
-        <pc:chgData name="Michael Hill" userId="41dba03d-e58d-4389-9894-554c10310ba4" providerId="ADAL" clId="{EF23FE1D-A042-481E-AFD7-2A9FB0847F54}" dt="2026-01-28T18:31:38.454" v="4346" actId="47"/>
-        <pc:sldMkLst>
-          <pc:docMk/>
-          <pc:sldMk cId="3903785388" sldId="501"/>
-        </pc:sldMkLst>
-      </pc:sldChg>
-      <pc:sldChg chg="del">
-        <pc:chgData name="Michael Hill" userId="41dba03d-e58d-4389-9894-554c10310ba4" providerId="ADAL" clId="{EF23FE1D-A042-481E-AFD7-2A9FB0847F54}" dt="2026-01-28T18:31:38.454" v="4346" actId="47"/>
-        <pc:sldMkLst>
-          <pc:docMk/>
-          <pc:sldMk cId="3001781421" sldId="502"/>
-        </pc:sldMkLst>
-      </pc:sldChg>
-      <pc:sldChg chg="del">
-        <pc:chgData name="Michael Hill" userId="41dba03d-e58d-4389-9894-554c10310ba4" providerId="ADAL" clId="{EF23FE1D-A042-481E-AFD7-2A9FB0847F54}" dt="2026-01-28T18:31:38.454" v="4346" actId="47"/>
-        <pc:sldMkLst>
-          <pc:docMk/>
-          <pc:sldMk cId="3747625186" sldId="503"/>
-        </pc:sldMkLst>
-      </pc:sldChg>
-      <pc:sldChg chg="del">
-        <pc:chgData name="Michael Hill" userId="41dba03d-e58d-4389-9894-554c10310ba4" providerId="ADAL" clId="{EF23FE1D-A042-481E-AFD7-2A9FB0847F54}" dt="2026-01-28T18:31:38.454" v="4346" actId="47"/>
-        <pc:sldMkLst>
-          <pc:docMk/>
-          <pc:sldMk cId="942284686" sldId="504"/>
-        </pc:sldMkLst>
-      </pc:sldChg>
-      <pc:sldChg chg="del">
-        <pc:chgData name="Michael Hill" userId="41dba03d-e58d-4389-9894-554c10310ba4" providerId="ADAL" clId="{EF23FE1D-A042-481E-AFD7-2A9FB0847F54}" dt="2026-01-28T18:31:38.454" v="4346" actId="47"/>
-        <pc:sldMkLst>
-          <pc:docMk/>
-          <pc:sldMk cId="1297082653" sldId="505"/>
-        </pc:sldMkLst>
-      </pc:sldChg>
-      <pc:sldChg chg="del">
-        <pc:chgData name="Michael Hill" userId="41dba03d-e58d-4389-9894-554c10310ba4" providerId="ADAL" clId="{EF23FE1D-A042-481E-AFD7-2A9FB0847F54}" dt="2026-01-28T18:31:38.454" v="4346" actId="47"/>
-        <pc:sldMkLst>
-          <pc:docMk/>
-          <pc:sldMk cId="1679458471" sldId="506"/>
-        </pc:sldMkLst>
-      </pc:sldChg>
-      <pc:sldChg chg="del">
-        <pc:chgData name="Michael Hill" userId="41dba03d-e58d-4389-9894-554c10310ba4" providerId="ADAL" clId="{EF23FE1D-A042-481E-AFD7-2A9FB0847F54}" dt="2026-01-28T18:31:38.454" v="4346" actId="47"/>
-        <pc:sldMkLst>
-          <pc:docMk/>
-          <pc:sldMk cId="110740488" sldId="507"/>
-        </pc:sldMkLst>
-      </pc:sldChg>
-      <pc:sldChg chg="del">
-        <pc:chgData name="Michael Hill" userId="41dba03d-e58d-4389-9894-554c10310ba4" providerId="ADAL" clId="{EF23FE1D-A042-481E-AFD7-2A9FB0847F54}" dt="2026-01-28T18:31:38.454" v="4346" actId="47"/>
-        <pc:sldMkLst>
-          <pc:docMk/>
-          <pc:sldMk cId="3506636498" sldId="508"/>
-        </pc:sldMkLst>
-      </pc:sldChg>
-      <pc:sldChg chg="del">
-        <pc:chgData name="Michael Hill" userId="41dba03d-e58d-4389-9894-554c10310ba4" providerId="ADAL" clId="{EF23FE1D-A042-481E-AFD7-2A9FB0847F54}" dt="2026-01-28T18:31:38.454" v="4346" actId="47"/>
-        <pc:sldMkLst>
-          <pc:docMk/>
-          <pc:sldMk cId="3646813003" sldId="509"/>
-        </pc:sldMkLst>
-      </pc:sldChg>
       <pc:sldChg chg="add ord">
         <pc:chgData name="Michael Hill" userId="41dba03d-e58d-4389-9894-554c10310ba4" providerId="ADAL" clId="{EF23FE1D-A042-481E-AFD7-2A9FB0847F54}" dt="2026-01-28T18:16:36.116" v="1844"/>
         <pc:sldMkLst>
           <pc:docMk/>
           <pc:sldMk cId="1907986003" sldId="510"/>
         </pc:sldMkLst>
-      </pc:sldChg>
-      <pc:sldChg chg="delSp modSp add del mod ord">
-        <pc:chgData name="Michael Hill" userId="41dba03d-e58d-4389-9894-554c10310ba4" providerId="ADAL" clId="{EF23FE1D-A042-481E-AFD7-2A9FB0847F54}" dt="2026-01-28T18:31:27.586" v="4345" actId="47"/>
-        <pc:sldMkLst>
-          <pc:docMk/>
-          <pc:sldMk cId="2019254660" sldId="511"/>
-        </pc:sldMkLst>
-        <pc:spChg chg="mod">
-          <ac:chgData name="Michael Hill" userId="41dba03d-e58d-4389-9894-554c10310ba4" providerId="ADAL" clId="{EF23FE1D-A042-481E-AFD7-2A9FB0847F54}" dt="2026-01-28T18:16:46.746" v="1859" actId="14100"/>
-          <ac:spMkLst>
-            <pc:docMk/>
-            <pc:sldMk cId="2019254660" sldId="511"/>
-            <ac:spMk id="6" creationId="{2B779DEC-EF96-FA9C-5083-9FD8A5E30D76}"/>
-          </ac:spMkLst>
-        </pc:spChg>
-        <pc:spChg chg="mod">
-          <ac:chgData name="Michael Hill" userId="41dba03d-e58d-4389-9894-554c10310ba4" providerId="ADAL" clId="{EF23FE1D-A042-481E-AFD7-2A9FB0847F54}" dt="2026-01-28T18:23:15.797" v="3092" actId="20577"/>
-          <ac:spMkLst>
-            <pc:docMk/>
-            <pc:sldMk cId="2019254660" sldId="511"/>
-            <ac:spMk id="8" creationId="{EB622228-74AA-282E-BC2D-58ACBEAD016C}"/>
-          </ac:spMkLst>
-        </pc:spChg>
-        <pc:picChg chg="del">
-          <ac:chgData name="Michael Hill" userId="41dba03d-e58d-4389-9894-554c10310ba4" providerId="ADAL" clId="{EF23FE1D-A042-481E-AFD7-2A9FB0847F54}" dt="2026-01-28T18:18:56.887" v="2302" actId="478"/>
-          <ac:picMkLst>
-            <pc:docMk/>
-            <pc:sldMk cId="2019254660" sldId="511"/>
-            <ac:picMk id="1026" creationId="{1E7C8352-7E80-A8E7-6901-A16770B2990F}"/>
-          </ac:picMkLst>
-        </pc:picChg>
       </pc:sldChg>
       <pc:sldChg chg="addSp delSp modSp add mod">
         <pc:chgData name="Michael Hill" userId="41dba03d-e58d-4389-9894-554c10310ba4" providerId="ADAL" clId="{EF23FE1D-A042-481E-AFD7-2A9FB0847F54}" dt="2026-01-28T18:22:15.838" v="2878" actId="1076"/>
@@ -526,14 +344,6 @@
             <ac:spMk id="8" creationId="{9801CEB3-A7D5-65F3-7115-88D6184C80E4}"/>
           </ac:spMkLst>
         </pc:spChg>
-        <pc:picChg chg="add del mod">
-          <ac:chgData name="Michael Hill" userId="41dba03d-e58d-4389-9894-554c10310ba4" providerId="ADAL" clId="{EF23FE1D-A042-481E-AFD7-2A9FB0847F54}" dt="2026-01-28T18:21:52.022" v="2873" actId="478"/>
-          <ac:picMkLst>
-            <pc:docMk/>
-            <pc:sldMk cId="576407881" sldId="512"/>
-            <ac:picMk id="2050" creationId="{096ABDD8-108F-7BF4-6EF2-A7F15CB8A285}"/>
-          </ac:picMkLst>
-        </pc:picChg>
         <pc:picChg chg="add mod">
           <ac:chgData name="Michael Hill" userId="41dba03d-e58d-4389-9894-554c10310ba4" providerId="ADAL" clId="{EF23FE1D-A042-481E-AFD7-2A9FB0847F54}" dt="2026-01-28T18:22:15.838" v="2878" actId="1076"/>
           <ac:picMkLst>
@@ -582,13 +392,13 @@
         </pc:picChg>
       </pc:sldChg>
       <pc:sldChg chg="modSp add mod">
-        <pc:chgData name="Michael Hill" userId="41dba03d-e58d-4389-9894-554c10310ba4" providerId="ADAL" clId="{EF23FE1D-A042-481E-AFD7-2A9FB0847F54}" dt="2026-01-28T18:27:52.890" v="3910" actId="14100"/>
+        <pc:chgData name="Michael Hill" userId="41dba03d-e58d-4389-9894-554c10310ba4" providerId="ADAL" clId="{EF23FE1D-A042-481E-AFD7-2A9FB0847F54}" dt="2026-01-29T18:37:41.837" v="8304" actId="20577"/>
         <pc:sldMkLst>
           <pc:docMk/>
           <pc:sldMk cId="2978622352" sldId="515"/>
         </pc:sldMkLst>
         <pc:spChg chg="mod">
-          <ac:chgData name="Michael Hill" userId="41dba03d-e58d-4389-9894-554c10310ba4" providerId="ADAL" clId="{EF23FE1D-A042-481E-AFD7-2A9FB0847F54}" dt="2026-01-28T18:27:52.890" v="3910" actId="14100"/>
+          <ac:chgData name="Michael Hill" userId="41dba03d-e58d-4389-9894-554c10310ba4" providerId="ADAL" clId="{EF23FE1D-A042-481E-AFD7-2A9FB0847F54}" dt="2026-01-29T18:37:41.837" v="8304" actId="20577"/>
           <ac:spMkLst>
             <pc:docMk/>
             <pc:sldMk cId="2978622352" sldId="515"/>
@@ -649,14 +459,6 @@
             <ac:spMk id="8" creationId="{835EB87E-C10C-B952-5320-BFEF2C066FE7}"/>
           </ac:spMkLst>
         </pc:spChg>
-        <pc:picChg chg="del">
-          <ac:chgData name="Michael Hill" userId="41dba03d-e58d-4389-9894-554c10310ba4" providerId="ADAL" clId="{EF23FE1D-A042-481E-AFD7-2A9FB0847F54}" dt="2026-01-28T18:32:42.113" v="4637" actId="478"/>
-          <ac:picMkLst>
-            <pc:docMk/>
-            <pc:sldMk cId="1959765264" sldId="517"/>
-            <ac:picMk id="4098" creationId="{D0D89A15-4D10-4C14-1DA5-74AB8EB816EA}"/>
-          </ac:picMkLst>
-        </pc:picChg>
         <pc:picChg chg="add mod">
           <ac:chgData name="Michael Hill" userId="41dba03d-e58d-4389-9894-554c10310ba4" providerId="ADAL" clId="{EF23FE1D-A042-481E-AFD7-2A9FB0847F54}" dt="2026-01-28T18:33:26.056" v="4649" actId="1076"/>
           <ac:picMkLst>
@@ -688,14 +490,6 @@
             <ac:spMk id="8" creationId="{779EDC73-197A-88EC-4A0F-DA4B8F6A855C}"/>
           </ac:spMkLst>
         </pc:spChg>
-        <pc:picChg chg="del">
-          <ac:chgData name="Michael Hill" userId="41dba03d-e58d-4389-9894-554c10310ba4" providerId="ADAL" clId="{EF23FE1D-A042-481E-AFD7-2A9FB0847F54}" dt="2026-01-28T18:34:16.288" v="4866" actId="478"/>
-          <ac:picMkLst>
-            <pc:docMk/>
-            <pc:sldMk cId="1750948792" sldId="518"/>
-            <ac:picMk id="5122" creationId="{8765BE71-1488-1EFB-4A9C-F99784C27610}"/>
-          </ac:picMkLst>
-        </pc:picChg>
         <pc:picChg chg="add mod">
           <ac:chgData name="Michael Hill" userId="41dba03d-e58d-4389-9894-554c10310ba4" providerId="ADAL" clId="{EF23FE1D-A042-481E-AFD7-2A9FB0847F54}" dt="2026-01-28T18:35:15.901" v="5021" actId="14100"/>
           <ac:picMkLst>
@@ -727,14 +521,6 @@
             <ac:spMk id="8" creationId="{B08F7CCE-F463-556F-7AFB-E5306336EADF}"/>
           </ac:spMkLst>
         </pc:spChg>
-        <pc:picChg chg="del">
-          <ac:chgData name="Michael Hill" userId="41dba03d-e58d-4389-9894-554c10310ba4" providerId="ADAL" clId="{EF23FE1D-A042-481E-AFD7-2A9FB0847F54}" dt="2026-01-28T18:36:14.003" v="5307" actId="478"/>
-          <ac:picMkLst>
-            <pc:docMk/>
-            <pc:sldMk cId="2996100434" sldId="519"/>
-            <ac:picMk id="6146" creationId="{287CEF27-85D4-56A5-6D95-27A81811E04A}"/>
-          </ac:picMkLst>
-        </pc:picChg>
         <pc:picChg chg="add mod">
           <ac:chgData name="Michael Hill" userId="41dba03d-e58d-4389-9894-554c10310ba4" providerId="ADAL" clId="{EF23FE1D-A042-481E-AFD7-2A9FB0847F54}" dt="2026-01-28T18:36:46.374" v="5391" actId="1076"/>
           <ac:picMkLst>
@@ -766,22 +552,6 @@
             <ac:spMk id="8" creationId="{2C564C9C-F4B7-2027-BF51-F9522CBF12FB}"/>
           </ac:spMkLst>
         </pc:spChg>
-        <pc:picChg chg="del">
-          <ac:chgData name="Michael Hill" userId="41dba03d-e58d-4389-9894-554c10310ba4" providerId="ADAL" clId="{EF23FE1D-A042-481E-AFD7-2A9FB0847F54}" dt="2026-01-28T18:37:53.761" v="5685" actId="478"/>
-          <ac:picMkLst>
-            <pc:docMk/>
-            <pc:sldMk cId="4150968954" sldId="520"/>
-            <ac:picMk id="7170" creationId="{7B05A13B-2B16-B5C7-02F2-4B084252F53F}"/>
-          </ac:picMkLst>
-        </pc:picChg>
-        <pc:picChg chg="add del mod">
-          <ac:chgData name="Michael Hill" userId="41dba03d-e58d-4389-9894-554c10310ba4" providerId="ADAL" clId="{EF23FE1D-A042-481E-AFD7-2A9FB0847F54}" dt="2026-01-28T18:40:21.272" v="6006" actId="478"/>
-          <ac:picMkLst>
-            <pc:docMk/>
-            <pc:sldMk cId="4150968954" sldId="520"/>
-            <ac:picMk id="8194" creationId="{7D403D80-CC0D-4D8B-23CC-CC3EB740030C}"/>
-          </ac:picMkLst>
-        </pc:picChg>
         <pc:picChg chg="add mod">
           <ac:chgData name="Michael Hill" userId="41dba03d-e58d-4389-9894-554c10310ba4" providerId="ADAL" clId="{EF23FE1D-A042-481E-AFD7-2A9FB0847F54}" dt="2026-01-28T18:40:56.075" v="6011" actId="1076"/>
           <ac:picMkLst>
@@ -805,14 +575,6 @@
             <ac:spMk id="6" creationId="{82DF3E19-DC73-B51A-B841-C0D4535B18F3}"/>
           </ac:spMkLst>
         </pc:spChg>
-        <pc:spChg chg="del">
-          <ac:chgData name="Michael Hill" userId="41dba03d-e58d-4389-9894-554c10310ba4" providerId="ADAL" clId="{EF23FE1D-A042-481E-AFD7-2A9FB0847F54}" dt="2026-01-28T18:38:16.376" v="5690" actId="478"/>
-          <ac:spMkLst>
-            <pc:docMk/>
-            <pc:sldMk cId="2454319330" sldId="521"/>
-            <ac:spMk id="8" creationId="{AE802933-8CFC-1F64-CAD7-71F286DAC741}"/>
-          </ac:spMkLst>
-        </pc:spChg>
         <pc:picChg chg="add mod">
           <ac:chgData name="Michael Hill" userId="41dba03d-e58d-4389-9894-554c10310ba4" providerId="ADAL" clId="{EF23FE1D-A042-481E-AFD7-2A9FB0847F54}" dt="2026-01-28T18:38:20.290" v="5694" actId="1076"/>
           <ac:picMkLst>
@@ -821,27 +583,12 @@
             <ac:picMk id="2" creationId="{32EAB769-6E5D-8184-A290-285669B489E8}"/>
           </ac:picMkLst>
         </pc:picChg>
-        <pc:picChg chg="del">
-          <ac:chgData name="Michael Hill" userId="41dba03d-e58d-4389-9894-554c10310ba4" providerId="ADAL" clId="{EF23FE1D-A042-481E-AFD7-2A9FB0847F54}" dt="2026-01-28T18:38:16.834" v="5691" actId="478"/>
-          <ac:picMkLst>
-            <pc:docMk/>
-            <pc:sldMk cId="2454319330" sldId="521"/>
-            <ac:picMk id="8194" creationId="{3597D924-30EC-E08B-B5E6-13CD279D8F9B}"/>
-          </ac:picMkLst>
-        </pc:picChg>
       </pc:sldChg>
       <pc:sldChg chg="add">
         <pc:chgData name="Michael Hill" userId="41dba03d-e58d-4389-9894-554c10310ba4" providerId="ADAL" clId="{EF23FE1D-A042-481E-AFD7-2A9FB0847F54}" dt="2026-01-28T18:38:55.243" v="5711" actId="2890"/>
         <pc:sldMkLst>
           <pc:docMk/>
           <pc:sldMk cId="104815971" sldId="522"/>
-        </pc:sldMkLst>
-      </pc:sldChg>
-      <pc:sldChg chg="add del">
-        <pc:chgData name="Michael Hill" userId="41dba03d-e58d-4389-9894-554c10310ba4" providerId="ADAL" clId="{EF23FE1D-A042-481E-AFD7-2A9FB0847F54}" dt="2026-01-28T18:38:54.002" v="5710" actId="47"/>
-        <pc:sldMkLst>
-          <pc:docMk/>
-          <pc:sldMk cId="3798290276" sldId="522"/>
         </pc:sldMkLst>
       </pc:sldChg>
       <pc:sldChg chg="addSp delSp modSp add mod">
@@ -881,14 +628,6 @@
             <ac:spMk id="8" creationId="{8D0414B2-ED36-2923-8CC8-948B2CAF49DE}"/>
           </ac:spMkLst>
         </pc:spChg>
-        <pc:picChg chg="del">
-          <ac:chgData name="Michael Hill" userId="41dba03d-e58d-4389-9894-554c10310ba4" providerId="ADAL" clId="{EF23FE1D-A042-481E-AFD7-2A9FB0847F54}" dt="2026-01-28T18:54:13.454" v="6308" actId="478"/>
-          <ac:picMkLst>
-            <pc:docMk/>
-            <pc:sldMk cId="2923763138" sldId="524"/>
-            <ac:picMk id="8196" creationId="{6F412DC5-5690-DE43-DF04-DDA883E4924E}"/>
-          </ac:picMkLst>
-        </pc:picChg>
       </pc:sldChg>
       <pc:sldChg chg="modSp add mod">
         <pc:chgData name="Michael Hill" userId="41dba03d-e58d-4389-9894-554c10310ba4" providerId="ADAL" clId="{EF23FE1D-A042-481E-AFD7-2A9FB0847F54}" dt="2026-01-28T18:59:13.066" v="7708" actId="114"/>
@@ -1007,7 +746,7 @@
           <a:p>
             <a:fld id="{4C0EF95B-9744-42BF-8E95-B5A640A352E6}" type="datetimeFigureOut">
               <a:rPr lang="en-US" smtClean="0"/>
-              <a:t>1/28/2026</a:t>
+              <a:t>1/30/2026</a:t>
             </a:fld>
             <a:endParaRPr lang="en-US"/>
           </a:p>
@@ -1421,7 +1160,7 @@
           <a:p>
             <a:fld id="{52CFA067-BC5A-4095-A3A5-99A1BAFE9208}" type="datetimeFigureOut">
               <a:rPr lang="en-US" smtClean="0"/>
-              <a:t>1/28/2026</a:t>
+              <a:t>1/30/2026</a:t>
             </a:fld>
             <a:endParaRPr lang="en-US"/>
           </a:p>
@@ -1619,7 +1358,7 @@
           <a:p>
             <a:fld id="{52CFA067-BC5A-4095-A3A5-99A1BAFE9208}" type="datetimeFigureOut">
               <a:rPr lang="en-US" smtClean="0"/>
-              <a:t>1/28/2026</a:t>
+              <a:t>1/30/2026</a:t>
             </a:fld>
             <a:endParaRPr lang="en-US"/>
           </a:p>
@@ -1827,7 +1566,7 @@
           <a:p>
             <a:fld id="{52CFA067-BC5A-4095-A3A5-99A1BAFE9208}" type="datetimeFigureOut">
               <a:rPr lang="en-US" smtClean="0"/>
-              <a:t>1/28/2026</a:t>
+              <a:t>1/30/2026</a:t>
             </a:fld>
             <a:endParaRPr lang="en-US"/>
           </a:p>
@@ -2025,7 +1764,7 @@
           <a:p>
             <a:fld id="{52CFA067-BC5A-4095-A3A5-99A1BAFE9208}" type="datetimeFigureOut">
               <a:rPr lang="en-US" smtClean="0"/>
-              <a:t>1/28/2026</a:t>
+              <a:t>1/30/2026</a:t>
             </a:fld>
             <a:endParaRPr lang="en-US"/>
           </a:p>
@@ -2300,7 +2039,7 @@
           <a:p>
             <a:fld id="{52CFA067-BC5A-4095-A3A5-99A1BAFE9208}" type="datetimeFigureOut">
               <a:rPr lang="en-US" smtClean="0"/>
-              <a:t>1/28/2026</a:t>
+              <a:t>1/30/2026</a:t>
             </a:fld>
             <a:endParaRPr lang="en-US"/>
           </a:p>
@@ -2565,7 +2304,7 @@
           <a:p>
             <a:fld id="{52CFA067-BC5A-4095-A3A5-99A1BAFE9208}" type="datetimeFigureOut">
               <a:rPr lang="en-US" smtClean="0"/>
-              <a:t>1/28/2026</a:t>
+              <a:t>1/30/2026</a:t>
             </a:fld>
             <a:endParaRPr lang="en-US"/>
           </a:p>
@@ -2977,7 +2716,7 @@
           <a:p>
             <a:fld id="{52CFA067-BC5A-4095-A3A5-99A1BAFE9208}" type="datetimeFigureOut">
               <a:rPr lang="en-US" smtClean="0"/>
-              <a:t>1/28/2026</a:t>
+              <a:t>1/30/2026</a:t>
             </a:fld>
             <a:endParaRPr lang="en-US"/>
           </a:p>
@@ -3118,7 +2857,7 @@
           <a:p>
             <a:fld id="{52CFA067-BC5A-4095-A3A5-99A1BAFE9208}" type="datetimeFigureOut">
               <a:rPr lang="en-US" smtClean="0"/>
-              <a:t>1/28/2026</a:t>
+              <a:t>1/30/2026</a:t>
             </a:fld>
             <a:endParaRPr lang="en-US"/>
           </a:p>
@@ -3231,7 +2970,7 @@
           <a:p>
             <a:fld id="{52CFA067-BC5A-4095-A3A5-99A1BAFE9208}" type="datetimeFigureOut">
               <a:rPr lang="en-US" smtClean="0"/>
-              <a:t>1/28/2026</a:t>
+              <a:t>1/30/2026</a:t>
             </a:fld>
             <a:endParaRPr lang="en-US"/>
           </a:p>
@@ -3542,7 +3281,7 @@
           <a:p>
             <a:fld id="{52CFA067-BC5A-4095-A3A5-99A1BAFE9208}" type="datetimeFigureOut">
               <a:rPr lang="en-US" smtClean="0"/>
-              <a:t>1/28/2026</a:t>
+              <a:t>1/30/2026</a:t>
             </a:fld>
             <a:endParaRPr lang="en-US"/>
           </a:p>
@@ -3830,7 +3569,7 @@
           <a:p>
             <a:fld id="{52CFA067-BC5A-4095-A3A5-99A1BAFE9208}" type="datetimeFigureOut">
               <a:rPr lang="en-US" smtClean="0"/>
-              <a:t>1/28/2026</a:t>
+              <a:t>1/30/2026</a:t>
             </a:fld>
             <a:endParaRPr lang="en-US"/>
           </a:p>
@@ -4071,7 +3810,7 @@
           <a:p>
             <a:fld id="{52CFA067-BC5A-4095-A3A5-99A1BAFE9208}" type="datetimeFigureOut">
               <a:rPr lang="en-US" smtClean="0"/>
-              <a:t>1/28/2026</a:t>
+              <a:t>1/30/2026</a:t>
             </a:fld>
             <a:endParaRPr lang="en-US"/>
           </a:p>
@@ -4785,6 +4524,58 @@
           </a:p>
         </p:txBody>
       </p:sp>
+      <p:sp>
+        <p:nvSpPr>
+          <p:cNvPr id="2" name="Star: 16 Points 1">
+            <a:extLst>
+              <a:ext uri="{FF2B5EF4-FFF2-40B4-BE49-F238E27FC236}">
+                <a16:creationId xmlns:a16="http://schemas.microsoft.com/office/drawing/2014/main" id="{5503F38F-8A7D-72A2-D3EF-F2D4051604CF}"/>
+              </a:ext>
+            </a:extLst>
+          </p:cNvPr>
+          <p:cNvSpPr/>
+          <p:nvPr/>
+        </p:nvSpPr>
+        <p:spPr>
+          <a:xfrm>
+            <a:off x="221178" y="429768"/>
+            <a:ext cx="1920240" cy="1920240"/>
+          </a:xfrm>
+          <a:prstGeom prst="star16">
+            <a:avLst/>
+          </a:prstGeom>
+          <a:ln>
+            <a:noFill/>
+          </a:ln>
+        </p:spPr>
+        <p:style>
+          <a:lnRef idx="2">
+            <a:schemeClr val="accent5">
+              <a:shade val="15000"/>
+            </a:schemeClr>
+          </a:lnRef>
+          <a:fillRef idx="1">
+            <a:schemeClr val="accent5"/>
+          </a:fillRef>
+          <a:effectRef idx="0">
+            <a:schemeClr val="accent5"/>
+          </a:effectRef>
+          <a:fontRef idx="minor">
+            <a:schemeClr val="lt1"/>
+          </a:fontRef>
+        </p:style>
+        <p:txBody>
+          <a:bodyPr rtlCol="0" anchor="ctr"/>
+          <a:lstStyle/>
+          <a:p>
+            <a:pPr algn="ctr"/>
+            <a:r>
+              <a:rPr lang="en-US" sz="2400" dirty="0"/>
+              <a:t>HL ONLY!</a:t>
+            </a:r>
+          </a:p>
+        </p:txBody>
+      </p:sp>
     </p:spTree>
     <p:extLst>
       <p:ext uri="{BB962C8B-B14F-4D97-AF65-F5344CB8AC3E}">
@@ -5712,7 +5503,7 @@
                 </a:solidFill>
                 <a:latin typeface="Bahnschrift" panose="020B0502040204020203" pitchFamily="34" charset="0"/>
               </a:rPr>
-              <a:t>Transaction 2 reads the value stored in Account A: $200</a:t>
+              <a:t>Transaction 2 reads the value stored in Account A: $500</a:t>
             </a:r>
           </a:p>
           <a:p>
@@ -5730,7 +5521,7 @@
                 </a:solidFill>
                 <a:latin typeface="Bahnschrift" panose="020B0502040204020203" pitchFamily="34" charset="0"/>
               </a:rPr>
-              <a:t>Transaction 1 subtracts from this value in memory: $700</a:t>
+              <a:t>Transaction 1 subtracts from this value in memory: $300</a:t>
             </a:r>
           </a:p>
           <a:p>
@@ -5748,7 +5539,7 @@
                 </a:solidFill>
                 <a:latin typeface="Bahnschrift" panose="020B0502040204020203" pitchFamily="34" charset="0"/>
               </a:rPr>
-              <a:t>Transaction 2 adds to this value in memory: $1100</a:t>
+              <a:t>Transaction 2 adds to this value in memory: $900</a:t>
             </a:r>
           </a:p>
           <a:p>
@@ -5766,7 +5557,7 @@
                 </a:solidFill>
                 <a:latin typeface="Bahnschrift" panose="020B0502040204020203" pitchFamily="34" charset="0"/>
               </a:rPr>
-              <a:t>Transaction 1 writes the new value to Account A: $700</a:t>
+              <a:t>Transaction 1 writes the new value to Account A: $300</a:t>
             </a:r>
           </a:p>
           <a:p>
@@ -5784,8 +5575,23 @@
                 </a:solidFill>
                 <a:latin typeface="Bahnschrift" panose="020B0502040204020203" pitchFamily="34" charset="0"/>
               </a:rPr>
-              <a:t>Transaction 2 writes the new value to Account A: $1100</a:t>
-            </a:r>
+              <a:t>Transaction 2 writes the new value to Account A</a:t>
+            </a:r>
+            <a:r>
+              <a:rPr lang="en-US" sz="2800">
+                <a:solidFill>
+                  <a:schemeClr val="bg1"/>
+                </a:solidFill>
+                <a:latin typeface="Bahnschrift" panose="020B0502040204020203" pitchFamily="34" charset="0"/>
+              </a:rPr>
+              <a:t>: $900</a:t>
+            </a:r>
+            <a:endParaRPr lang="en-US" sz="2800" dirty="0">
+              <a:solidFill>
+                <a:schemeClr val="bg1"/>
+              </a:solidFill>
+              <a:latin typeface="Bahnschrift" panose="020B0502040204020203" pitchFamily="34" charset="0"/>
+            </a:endParaRPr>
           </a:p>
           <a:p>
             <a:pPr marL="457200" indent="-457200">
@@ -13306,7 +13112,7 @@
                 </a:solidFill>
                 <a:latin typeface="Bahnschrift" panose="020B0502040204020203" pitchFamily="34" charset="0"/>
               </a:rPr>
-              <a:t>JOIN Statement</a:t>
+              <a:t>ACID</a:t>
             </a:r>
           </a:p>
           <a:p>
@@ -13324,7 +13130,7 @@
                 </a:solidFill>
                 <a:latin typeface="Bahnschrift" panose="020B0502040204020203" pitchFamily="34" charset="0"/>
               </a:rPr>
-              <a:t>WHERE Clause</a:t>
+              <a:t>Atomicity</a:t>
             </a:r>
           </a:p>
           <a:p>
@@ -13342,7 +13148,7 @@
                 </a:solidFill>
                 <a:latin typeface="Bahnschrift" panose="020B0502040204020203" pitchFamily="34" charset="0"/>
               </a:rPr>
-              <a:t>Relational Operators</a:t>
+              <a:t>Consistency</a:t>
             </a:r>
           </a:p>
           <a:p>
@@ -13360,7 +13166,7 @@
                 </a:solidFill>
                 <a:latin typeface="Bahnschrift" panose="020B0502040204020203" pitchFamily="34" charset="0"/>
               </a:rPr>
-              <a:t>Filtering</a:t>
+              <a:t>Isolation</a:t>
             </a:r>
           </a:p>
           <a:p>
@@ -13378,7 +13184,7 @@
                 </a:solidFill>
                 <a:latin typeface="Bahnschrift" panose="020B0502040204020203" pitchFamily="34" charset="0"/>
               </a:rPr>
-              <a:t>Pattern Matching</a:t>
+              <a:t>Durability</a:t>
             </a:r>
           </a:p>
           <a:p>
@@ -13396,7 +13202,7 @@
                 </a:solidFill>
                 <a:latin typeface="Bahnschrift" panose="020B0502040204020203" pitchFamily="34" charset="0"/>
               </a:rPr>
-              <a:t>Insert Queries</a:t>
+              <a:t>Transaction Control Language</a:t>
             </a:r>
           </a:p>
           <a:p>
@@ -13414,7 +13220,7 @@
                 </a:solidFill>
                 <a:latin typeface="Bahnschrift" panose="020B0502040204020203" pitchFamily="34" charset="0"/>
               </a:rPr>
-              <a:t>Delete Queries</a:t>
+              <a:t>BEGIN TRANSACTION</a:t>
             </a:r>
           </a:p>
           <a:p>
@@ -13432,7 +13238,25 @@
                 </a:solidFill>
                 <a:latin typeface="Bahnschrift" panose="020B0502040204020203" pitchFamily="34" charset="0"/>
               </a:rPr>
-              <a:t>Update Queries</a:t>
+              <a:t>COMMIT</a:t>
+            </a:r>
+          </a:p>
+          <a:p>
+            <a:pPr marL="457200" indent="-457200">
+              <a:spcBef>
+                <a:spcPts val="1200"/>
+              </a:spcBef>
+              <a:buFont typeface="Arial" panose="020B0604020202020204" pitchFamily="34" charset="0"/>
+              <a:buChar char="•"/>
+            </a:pPr>
+            <a:r>
+              <a:rPr lang="en-US" sz="2800" dirty="0">
+                <a:solidFill>
+                  <a:schemeClr val="bg1"/>
+                </a:solidFill>
+                <a:latin typeface="Bahnschrift" panose="020B0502040204020203" pitchFamily="34" charset="0"/>
+              </a:rPr>
+              <a:t>ROLLBACK</a:t>
             </a:r>
           </a:p>
         </p:txBody>
